--- a/assets/presentations/diaporamas/P1-ce-qu-il-y-a-dans-la-boite.pptx
+++ b/assets/presentations/diaporamas/P1-ce-qu-il-y-a-dans-la-boite.pptx
@@ -15,6 +15,8 @@
     <p:sldId id="263" r:id="rId15"/>
     <p:sldId id="264" r:id="rId16"/>
     <p:sldId id="265" r:id="rId17"/>
+    <p:sldId id="266" r:id="rId18"/>
+    <p:sldId id="267" r:id="rId19"/>
   </p:sldIdLst>
   <p:sldSz cx="12191695" cy="6858000" type="screen4x3"/>
   <p:notesSz cx="6858000" cy="9144000"/>
@@ -581,6 +583,146 @@
           <a:lstStyle/>
           <a:p>
             <a:r>
+              <a:t>Dire que ce que la salle regarde en ce moment sort du même système : c'est le produit qui se présente lui-même.</a:t>
+            </a:r>
+          </a:p>
+        </p:txBody>
+      </p:sp>
+      <p:sp>
+        <p:nvSpPr>
+          <p:cNvPr id="4" name="Slide Number Placeholder 3"/>
+          <p:cNvSpPr>
+            <a:spLocks noGrp="1"/>
+          </p:cNvSpPr>
+          <p:nvPr>
+            <p:ph type="sldNum" idx="5" sz="quarter"/>
+          </p:nvPr>
+        </p:nvSpPr>
+        <p:spPr/>
+      </p:sp>
+    </p:spTree>
+  </p:cSld>
+  <p:clrMapOvr>
+    <a:masterClrMapping/>
+  </p:clrMapOvr>
+</p:notes>
+</file>
+
+<file path=ppt/notesSlides/notesSlide11.xml><?xml version="1.0" encoding="utf-8"?>
+<p:notes xmlns:a="http://schemas.openxmlformats.org/drawingml/2006/main" xmlns:p="http://schemas.openxmlformats.org/presentationml/2006/main" xmlns:r="http://schemas.openxmlformats.org/officeDocument/2006/relationships">
+  <p:cSld>
+    <p:spTree>
+      <p:nvGrpSpPr>
+        <p:cNvPr id="1" name=""/>
+        <p:cNvGrpSpPr/>
+        <p:nvPr/>
+      </p:nvGrpSpPr>
+      <p:grpSpPr>
+        <a:xfrm>
+          <a:off x="0" y="0"/>
+          <a:ext cx="0" cy="0"/>
+          <a:chOff x="0" y="0"/>
+          <a:chExt cx="0" cy="0"/>
+        </a:xfrm>
+      </p:grpSpPr>
+      <p:sp>
+        <p:nvSpPr>
+          <p:cNvPr id="2" name="Slide Image Placeholder 1"/>
+          <p:cNvSpPr>
+            <a:spLocks noGrp="1"/>
+          </p:cNvSpPr>
+          <p:nvPr>
+            <p:ph type="sldImg" idx="2"/>
+          </p:nvPr>
+        </p:nvSpPr>
+        <p:spPr/>
+      </p:sp>
+      <p:sp>
+        <p:nvSpPr>
+          <p:cNvPr id="3" name="Notes Placeholder 2"/>
+          <p:cNvSpPr>
+            <a:spLocks noGrp="1"/>
+          </p:cNvSpPr>
+          <p:nvPr>
+            <p:ph type="body" idx="3" sz="quarter"/>
+          </p:nvPr>
+        </p:nvSpPr>
+        <p:spPr/>
+        <p:txBody>
+          <a:bodyPr/>
+          <a:lstStyle/>
+          <a:p>
+            <a:r>
+              <a:t>Objection réelle, entendue en salle. Ne pas la balayer : montrer le bouton « Remplacer l'officiel » dans le dépôt de matériel.</a:t>
+            </a:r>
+          </a:p>
+        </p:txBody>
+      </p:sp>
+      <p:sp>
+        <p:nvSpPr>
+          <p:cNvPr id="4" name="Slide Number Placeholder 3"/>
+          <p:cNvSpPr>
+            <a:spLocks noGrp="1"/>
+          </p:cNvSpPr>
+          <p:nvPr>
+            <p:ph type="sldNum" idx="5" sz="quarter"/>
+          </p:nvPr>
+        </p:nvSpPr>
+        <p:spPr/>
+      </p:sp>
+    </p:spTree>
+  </p:cSld>
+  <p:clrMapOvr>
+    <a:masterClrMapping/>
+  </p:clrMapOvr>
+</p:notes>
+</file>
+
+<file path=ppt/notesSlides/notesSlide12.xml><?xml version="1.0" encoding="utf-8"?>
+<p:notes xmlns:a="http://schemas.openxmlformats.org/drawingml/2006/main" xmlns:p="http://schemas.openxmlformats.org/presentationml/2006/main" xmlns:r="http://schemas.openxmlformats.org/officeDocument/2006/relationships">
+  <p:cSld>
+    <p:spTree>
+      <p:nvGrpSpPr>
+        <p:cNvPr id="1" name=""/>
+        <p:cNvGrpSpPr/>
+        <p:nvPr/>
+      </p:nvGrpSpPr>
+      <p:grpSpPr>
+        <a:xfrm>
+          <a:off x="0" y="0"/>
+          <a:ext cx="0" cy="0"/>
+          <a:chOff x="0" y="0"/>
+          <a:chExt cx="0" cy="0"/>
+        </a:xfrm>
+      </p:grpSpPr>
+      <p:sp>
+        <p:nvSpPr>
+          <p:cNvPr id="2" name="Slide Image Placeholder 1"/>
+          <p:cNvSpPr>
+            <a:spLocks noGrp="1"/>
+          </p:cNvSpPr>
+          <p:nvPr>
+            <p:ph type="sldImg" idx="2"/>
+          </p:nvPr>
+        </p:nvSpPr>
+        <p:spPr/>
+      </p:sp>
+      <p:sp>
+        <p:nvSpPr>
+          <p:cNvPr id="3" name="Notes Placeholder 2"/>
+          <p:cNvSpPr>
+            <a:spLocks noGrp="1"/>
+          </p:cNvSpPr>
+          <p:nvPr>
+            <p:ph type="body" idx="3" sz="quarter"/>
+          </p:nvPr>
+        </p:nvSpPr>
+        <p:spPr/>
+        <p:txBody>
+          <a:bodyPr/>
+          <a:lstStyle/>
+          <a:p>
+            <a:r>
               <a:t>Laisser le silence. C'est la question qui fait passer la rencontre de « joli produit » à « combien on économise ».</a:t>
             </a:r>
           </a:p>
@@ -1001,7 +1143,7 @@
           <a:lstStyle/>
           <a:p>
             <a:r>
-              <a:t>Insister sur les voix : c'est ce qui permet à l'élève d'écouter quinze fois sans user la patience de personne.</a:t>
+              <a:t>La capture qui répond à « qui va préparer tout ça ? » mieux que n'importe quel chiffre. Laisser deux secondes de silence.</a:t>
             </a:r>
           </a:p>
         </p:txBody>
@@ -1071,7 +1213,7 @@
           <a:lstStyle/>
           <a:p>
             <a:r>
-              <a:t>Le chiffre des notes est celui qui compte pour un remplaçant : la séance se donne sans avoir été écrite par soi.</a:t>
+              <a:t>Insister sur les voix : c'est ce qui permet à l'élève d'écouter quinze fois sans user la patience de personne.</a:t>
             </a:r>
           </a:p>
         </p:txBody>
@@ -1141,7 +1283,7 @@
           <a:lstStyle/>
           <a:p>
             <a:r>
-              <a:t>Objection réelle, entendue en salle. Ne pas la balayer : montrer le bouton « Remplacer l'officiel » dans le dépôt de matériel.</a:t>
+              <a:t>Le chiffre des notes est celui qui compte pour un remplaçant : la séance se donne sans avoir été écrite par soi.</a:t>
             </a:r>
           </a:p>
         </p:txBody>
@@ -4531,6 +4673,880 @@
       </p:sp>
       <p:sp>
         <p:nvSpPr>
+          <p:cNvPr id="5" name="TextBox 4"/>
+          <p:cNvSpPr txBox="1"/>
+          <p:nvPr/>
+        </p:nvSpPr>
+        <p:spPr>
+          <a:xfrm>
+            <a:off x="566928" y="420624"/>
+            <a:ext cx="11057839" cy="237744"/>
+          </a:xfrm>
+          <a:prstGeom prst="rect">
+            <a:avLst/>
+          </a:prstGeom>
+          <a:noFill/>
+        </p:spPr>
+        <p:txBody>
+          <a:bodyPr wrap="square" lIns="0" rIns="0" tIns="0" bIns="0" anchor="t">
+            <a:spAutoFit/>
+          </a:bodyPr>
+          <a:lstStyle/>
+          <a:p>
+            <a:pPr algn="l">
+              <a:lnSpc>
+                <a:spcPct val="135000"/>
+              </a:lnSpc>
+            </a:pPr>
+            <a:r>
+              <a:rPr sz="1300" b="1" i="0" spc="156">
+                <a:solidFill>
+                  <a:srgbClr val="0D7A6F"/>
+                </a:solidFill>
+                <a:latin typeface="Verdana"/>
+              </a:rPr>
+              <a:t>POUR VOUS</a:t>
+            </a:r>
+          </a:p>
+        </p:txBody>
+      </p:sp>
+      <p:sp>
+        <p:nvSpPr>
+          <p:cNvPr id="6" name="TextBox 5"/>
+          <p:cNvSpPr txBox="1"/>
+          <p:nvPr/>
+        </p:nvSpPr>
+        <p:spPr>
+          <a:xfrm>
+            <a:off x="566928" y="749808"/>
+            <a:ext cx="11057839" cy="877824"/>
+          </a:xfrm>
+          <a:prstGeom prst="rect">
+            <a:avLst/>
+          </a:prstGeom>
+          <a:noFill/>
+        </p:spPr>
+        <p:txBody>
+          <a:bodyPr wrap="square" lIns="0" rIns="0" tIns="0" bIns="0" anchor="t">
+            <a:spAutoFit/>
+          </a:bodyPr>
+          <a:lstStyle/>
+          <a:p>
+            <a:pPr algn="l">
+              <a:lnSpc>
+                <a:spcPct val="115000"/>
+              </a:lnSpc>
+            </a:pPr>
+            <a:r>
+              <a:rPr sz="3400" b="1" i="0">
+                <a:solidFill>
+                  <a:srgbClr val="17181A"/>
+                </a:solidFill>
+                <a:latin typeface="Verdana"/>
+              </a:rPr>
+              <a:t>Une séance, telle qu'elle est projetée</a:t>
+            </a:r>
+          </a:p>
+        </p:txBody>
+      </p:sp>
+      <p:sp>
+        <p:nvSpPr>
+          <p:cNvPr id="7" name="TextBox 6"/>
+          <p:cNvSpPr txBox="1"/>
+          <p:nvPr/>
+        </p:nvSpPr>
+        <p:spPr>
+          <a:xfrm>
+            <a:off x="566928" y="1645920"/>
+            <a:ext cx="11057839" cy="617220"/>
+          </a:xfrm>
+          <a:prstGeom prst="rect">
+            <a:avLst/>
+          </a:prstGeom>
+          <a:noFill/>
+        </p:spPr>
+        <p:txBody>
+          <a:bodyPr wrap="square" lIns="0" rIns="0" tIns="0" bIns="0" anchor="t">
+            <a:spAutoFit/>
+          </a:bodyPr>
+          <a:lstStyle/>
+          <a:p>
+            <a:pPr algn="l">
+              <a:lnSpc>
+                <a:spcPct val="135000"/>
+              </a:lnSpc>
+            </a:pPr>
+            <a:r>
+              <a:rPr sz="1800" b="0" i="0">
+                <a:solidFill>
+                  <a:srgbClr val="6E7175"/>
+                </a:solidFill>
+                <a:latin typeface="Verdana"/>
+              </a:rPr>
+              <a:t>La première diapositive d'une séance de quatre heures. Il y en a seize par module, et elles se donnent sans avoir été écrites par soi.</a:t>
+            </a:r>
+          </a:p>
+        </p:txBody>
+      </p:sp>
+      <p:sp>
+        <p:nvSpPr>
+          <p:cNvPr id="8" name="Rounded Rectangle 7"/>
+          <p:cNvSpPr/>
+          <p:nvPr/>
+        </p:nvSpPr>
+        <p:spPr>
+          <a:xfrm>
+            <a:off x="2735009" y="2372868"/>
+            <a:ext cx="6721675" cy="3799332"/>
+          </a:xfrm>
+          <a:prstGeom prst="roundRect">
+            <a:avLst>
+              <a:gd name="adj" fmla="val 2406"/>
+            </a:avLst>
+          </a:prstGeom>
+          <a:solidFill>
+            <a:srgbClr val="FFFFFF"/>
+          </a:solidFill>
+          <a:ln w="12700">
+            <a:solidFill>
+              <a:srgbClr val="D6D6D2"/>
+            </a:solidFill>
+          </a:ln>
+          <a:effectLst/>
+        </p:spPr>
+        <p:style>
+          <a:lnRef idx="1">
+            <a:schemeClr val="accent1"/>
+          </a:lnRef>
+          <a:fillRef idx="3">
+            <a:schemeClr val="accent1"/>
+          </a:fillRef>
+          <a:effectRef idx="2">
+            <a:schemeClr val="accent1"/>
+          </a:effectRef>
+          <a:fontRef idx="minor">
+            <a:schemeClr val="lt1"/>
+          </a:fontRef>
+        </p:style>
+        <p:txBody>
+          <a:bodyPr rtlCol="0" anchor="ctr"/>
+          <a:lstStyle/>
+          <a:p/>
+        </p:txBody>
+      </p:sp>
+      <p:pic>
+        <p:nvPicPr>
+          <p:cNvPr id="9" name="Picture 8" descr="mat-10-diapo-titre.png"/>
+          <p:cNvPicPr>
+            <a:picLocks noChangeAspect="1"/>
+          </p:cNvPicPr>
+          <p:nvPr/>
+        </p:nvPicPr>
+        <p:blipFill>
+          <a:blip r:embed="rId2"/>
+          <a:stretch>
+            <a:fillRect/>
+          </a:stretch>
+        </p:blipFill>
+        <p:spPr>
+          <a:xfrm>
+            <a:off x="2753297" y="2391156"/>
+            <a:ext cx="6685099" cy="3762756"/>
+          </a:xfrm>
+          <a:prstGeom prst="rect">
+            <a:avLst/>
+          </a:prstGeom>
+        </p:spPr>
+      </p:pic>
+    </p:spTree>
+  </p:cSld>
+  <p:clrMapOvr>
+    <a:masterClrMapping/>
+  </p:clrMapOvr>
+</p:sld>
+</file>
+
+<file path=ppt/slides/slide11.xml><?xml version="1.0" encoding="utf-8"?>
+<p:sld xmlns:a="http://schemas.openxmlformats.org/drawingml/2006/main" xmlns:p="http://schemas.openxmlformats.org/presentationml/2006/main" xmlns:r="http://schemas.openxmlformats.org/officeDocument/2006/relationships">
+  <p:cSld>
+    <p:spTree>
+      <p:nvGrpSpPr>
+        <p:cNvPr id="1" name=""/>
+        <p:cNvGrpSpPr/>
+        <p:nvPr/>
+      </p:nvGrpSpPr>
+      <p:grpSpPr/>
+      <p:sp>
+        <p:nvSpPr>
+          <p:cNvPr id="2" name="Rectangle 1"/>
+          <p:cNvSpPr/>
+          <p:nvPr/>
+        </p:nvSpPr>
+        <p:spPr>
+          <a:xfrm>
+            <a:off x="0" y="0"/>
+            <a:ext cx="12191695" cy="6858000"/>
+          </a:xfrm>
+          <a:prstGeom prst="rect">
+            <a:avLst/>
+          </a:prstGeom>
+          <a:solidFill>
+            <a:srgbClr val="F7F7F5"/>
+          </a:solidFill>
+          <a:ln>
+            <a:noFill/>
+          </a:ln>
+          <a:effectLst/>
+        </p:spPr>
+        <p:style>
+          <a:lnRef idx="1">
+            <a:schemeClr val="accent1"/>
+          </a:lnRef>
+          <a:fillRef idx="3">
+            <a:schemeClr val="accent1"/>
+          </a:fillRef>
+          <a:effectRef idx="2">
+            <a:schemeClr val="accent1"/>
+          </a:effectRef>
+          <a:fontRef idx="minor">
+            <a:schemeClr val="lt1"/>
+          </a:fontRef>
+        </p:style>
+        <p:txBody>
+          <a:bodyPr rtlCol="0" anchor="ctr"/>
+          <a:lstStyle/>
+          <a:p/>
+        </p:txBody>
+      </p:sp>
+      <p:sp>
+        <p:nvSpPr>
+          <p:cNvPr id="3" name="TextBox 2"/>
+          <p:cNvSpPr txBox="1"/>
+          <p:nvPr/>
+        </p:nvSpPr>
+        <p:spPr>
+          <a:xfrm>
+            <a:off x="566928" y="6355080"/>
+            <a:ext cx="6400800" cy="219456"/>
+          </a:xfrm>
+          <a:prstGeom prst="rect">
+            <a:avLst/>
+          </a:prstGeom>
+          <a:noFill/>
+        </p:spPr>
+        <p:txBody>
+          <a:bodyPr wrap="square" lIns="0" rIns="0" tIns="0" bIns="0" anchor="t">
+            <a:spAutoFit/>
+          </a:bodyPr>
+          <a:lstStyle/>
+          <a:p>
+            <a:pPr algn="l">
+              <a:lnSpc>
+                <a:spcPct val="135000"/>
+              </a:lnSpc>
+            </a:pPr>
+            <a:r>
+              <a:rPr sz="1200" b="0" i="0">
+                <a:solidFill>
+                  <a:srgbClr val="6E7175"/>
+                </a:solidFill>
+                <a:latin typeface="Verdana"/>
+              </a:rPr>
+              <a:t>P1 · francis · présentation</a:t>
+            </a:r>
+          </a:p>
+        </p:txBody>
+      </p:sp>
+      <p:sp>
+        <p:nvSpPr>
+          <p:cNvPr id="4" name="TextBox 3"/>
+          <p:cNvSpPr txBox="1"/>
+          <p:nvPr/>
+        </p:nvSpPr>
+        <p:spPr>
+          <a:xfrm>
+            <a:off x="10710367" y="6355080"/>
+            <a:ext cx="914400" cy="219456"/>
+          </a:xfrm>
+          <a:prstGeom prst="rect">
+            <a:avLst/>
+          </a:prstGeom>
+          <a:noFill/>
+        </p:spPr>
+        <p:txBody>
+          <a:bodyPr wrap="square" lIns="0" rIns="0" tIns="0" bIns="0" anchor="t">
+            <a:spAutoFit/>
+          </a:bodyPr>
+          <a:lstStyle/>
+          <a:p>
+            <a:pPr algn="r">
+              <a:lnSpc>
+                <a:spcPct val="135000"/>
+              </a:lnSpc>
+            </a:pPr>
+            <a:r>
+              <a:rPr sz="1200" b="0" i="0">
+                <a:solidFill>
+                  <a:srgbClr val="6E7175"/>
+                </a:solidFill>
+                <a:latin typeface="Verdana"/>
+              </a:rPr>
+              <a:t>11</a:t>
+            </a:r>
+          </a:p>
+        </p:txBody>
+      </p:sp>
+      <p:sp>
+        <p:nvSpPr>
+          <p:cNvPr id="5" name="TextBox 4"/>
+          <p:cNvSpPr txBox="1"/>
+          <p:nvPr/>
+        </p:nvSpPr>
+        <p:spPr>
+          <a:xfrm>
+            <a:off x="566928" y="420624"/>
+            <a:ext cx="11057839" cy="237744"/>
+          </a:xfrm>
+          <a:prstGeom prst="rect">
+            <a:avLst/>
+          </a:prstGeom>
+          <a:noFill/>
+        </p:spPr>
+        <p:txBody>
+          <a:bodyPr wrap="square" lIns="0" rIns="0" tIns="0" bIns="0" anchor="t">
+            <a:spAutoFit/>
+          </a:bodyPr>
+          <a:lstStyle/>
+          <a:p>
+            <a:pPr algn="l">
+              <a:lnSpc>
+                <a:spcPct val="135000"/>
+              </a:lnSpc>
+            </a:pPr>
+            <a:r>
+              <a:rPr sz="1300" b="1" i="0" spc="156">
+                <a:solidFill>
+                  <a:srgbClr val="0D7A6F"/>
+                </a:solidFill>
+                <a:latin typeface="Verdana"/>
+              </a:rPr>
+              <a:t>CE QU'ON ENTEND</a:t>
+            </a:r>
+          </a:p>
+        </p:txBody>
+      </p:sp>
+      <p:sp>
+        <p:nvSpPr>
+          <p:cNvPr id="6" name="TextBox 5"/>
+          <p:cNvSpPr txBox="1"/>
+          <p:nvPr/>
+        </p:nvSpPr>
+        <p:spPr>
+          <a:xfrm>
+            <a:off x="566928" y="749808"/>
+            <a:ext cx="11057839" cy="877824"/>
+          </a:xfrm>
+          <a:prstGeom prst="rect">
+            <a:avLst/>
+          </a:prstGeom>
+          <a:noFill/>
+        </p:spPr>
+        <p:txBody>
+          <a:bodyPr wrap="square" lIns="0" rIns="0" tIns="0" bIns="0" anchor="t">
+            <a:spAutoFit/>
+          </a:bodyPr>
+          <a:lstStyle/>
+          <a:p>
+            <a:pPr algn="l">
+              <a:lnSpc>
+                <a:spcPct val="115000"/>
+              </a:lnSpc>
+            </a:pPr>
+            <a:r>
+              <a:rPr sz="3400" b="1" i="0">
+                <a:solidFill>
+                  <a:srgbClr val="17181A"/>
+                </a:solidFill>
+                <a:latin typeface="Verdana"/>
+              </a:rPr>
+              <a:t>Le piège le plus fréquent</a:t>
+            </a:r>
+          </a:p>
+        </p:txBody>
+      </p:sp>
+      <p:sp>
+        <p:nvSpPr>
+          <p:cNvPr id="7" name="Rounded Rectangle 6"/>
+          <p:cNvSpPr/>
+          <p:nvPr/>
+        </p:nvSpPr>
+        <p:spPr>
+          <a:xfrm>
+            <a:off x="566928" y="1856232"/>
+            <a:ext cx="5428335" cy="2331720"/>
+          </a:xfrm>
+          <a:prstGeom prst="roundRect">
+            <a:avLst>
+              <a:gd name="adj" fmla="val 6274"/>
+            </a:avLst>
+          </a:prstGeom>
+          <a:solidFill>
+            <a:srgbClr val="FFF6F5"/>
+          </a:solidFill>
+          <a:ln w="12700">
+            <a:solidFill>
+              <a:srgbClr val="DC2626"/>
+            </a:solidFill>
+          </a:ln>
+          <a:effectLst/>
+        </p:spPr>
+        <p:style>
+          <a:lnRef idx="1">
+            <a:schemeClr val="accent1"/>
+          </a:lnRef>
+          <a:fillRef idx="3">
+            <a:schemeClr val="accent1"/>
+          </a:fillRef>
+          <a:effectRef idx="2">
+            <a:schemeClr val="accent1"/>
+          </a:effectRef>
+          <a:fontRef idx="minor">
+            <a:schemeClr val="lt1"/>
+          </a:fontRef>
+        </p:style>
+        <p:txBody>
+          <a:bodyPr rtlCol="0" anchor="ctr"/>
+          <a:lstStyle/>
+          <a:p/>
+        </p:txBody>
+      </p:sp>
+      <p:sp>
+        <p:nvSpPr>
+          <p:cNvPr id="8" name="TextBox 7"/>
+          <p:cNvSpPr txBox="1"/>
+          <p:nvPr/>
+        </p:nvSpPr>
+        <p:spPr>
+          <a:xfrm>
+            <a:off x="932688" y="2130552"/>
+            <a:ext cx="4696815" cy="274320"/>
+          </a:xfrm>
+          <a:prstGeom prst="rect">
+            <a:avLst/>
+          </a:prstGeom>
+          <a:noFill/>
+        </p:spPr>
+        <p:txBody>
+          <a:bodyPr wrap="square" lIns="0" rIns="0" tIns="0" bIns="0" anchor="t">
+            <a:spAutoFit/>
+          </a:bodyPr>
+          <a:lstStyle/>
+          <a:p>
+            <a:pPr algn="l">
+              <a:lnSpc>
+                <a:spcPct val="135000"/>
+              </a:lnSpc>
+            </a:pPr>
+            <a:r>
+              <a:rPr sz="1300" b="1" i="0" spc="156">
+                <a:solidFill>
+                  <a:srgbClr val="B91C1C"/>
+                </a:solidFill>
+                <a:latin typeface="Verdana"/>
+              </a:rPr>
+              <a:t>ON ENTEND SOUVENT</a:t>
+            </a:r>
+          </a:p>
+        </p:txBody>
+      </p:sp>
+      <p:sp>
+        <p:nvSpPr>
+          <p:cNvPr id="9" name="TextBox 8"/>
+          <p:cNvSpPr txBox="1"/>
+          <p:nvPr/>
+        </p:nvSpPr>
+        <p:spPr>
+          <a:xfrm>
+            <a:off x="932688" y="2569464"/>
+            <a:ext cx="4696815" cy="1417320"/>
+          </a:xfrm>
+          <a:prstGeom prst="rect">
+            <a:avLst/>
+          </a:prstGeom>
+          <a:noFill/>
+        </p:spPr>
+        <p:txBody>
+          <a:bodyPr wrap="square" lIns="0" rIns="0" tIns="0" bIns="0" anchor="t">
+            <a:spAutoFit/>
+          </a:bodyPr>
+          <a:lstStyle/>
+          <a:p>
+            <a:pPr algn="l">
+              <a:lnSpc>
+                <a:spcPct val="130000"/>
+              </a:lnSpc>
+            </a:pPr>
+            <a:r>
+              <a:rPr sz="2500" b="1" i="0">
+                <a:solidFill>
+                  <a:srgbClr val="17181A"/>
+                </a:solidFill>
+                <a:latin typeface="Verdana"/>
+              </a:rPr>
+              <a:t>« Du matériel tout fait, mes enseignants n'en voudront pas. »</a:t>
+            </a:r>
+          </a:p>
+        </p:txBody>
+      </p:sp>
+      <p:sp>
+        <p:nvSpPr>
+          <p:cNvPr id="10" name="Rounded Rectangle 9"/>
+          <p:cNvSpPr/>
+          <p:nvPr/>
+        </p:nvSpPr>
+        <p:spPr>
+          <a:xfrm>
+            <a:off x="6196431" y="1856232"/>
+            <a:ext cx="5428335" cy="2331720"/>
+          </a:xfrm>
+          <a:prstGeom prst="roundRect">
+            <a:avLst>
+              <a:gd name="adj" fmla="val 6274"/>
+            </a:avLst>
+          </a:prstGeom>
+          <a:solidFill>
+            <a:srgbClr val="E6F5EE"/>
+          </a:solidFill>
+          <a:ln w="12700">
+            <a:solidFill>
+              <a:srgbClr val="0A8F5B"/>
+            </a:solidFill>
+          </a:ln>
+          <a:effectLst/>
+        </p:spPr>
+        <p:style>
+          <a:lnRef idx="1">
+            <a:schemeClr val="accent1"/>
+          </a:lnRef>
+          <a:fillRef idx="3">
+            <a:schemeClr val="accent1"/>
+          </a:fillRef>
+          <a:effectRef idx="2">
+            <a:schemeClr val="accent1"/>
+          </a:effectRef>
+          <a:fontRef idx="minor">
+            <a:schemeClr val="lt1"/>
+          </a:fontRef>
+        </p:style>
+        <p:txBody>
+          <a:bodyPr rtlCol="0" anchor="ctr"/>
+          <a:lstStyle/>
+          <a:p/>
+        </p:txBody>
+      </p:sp>
+      <p:sp>
+        <p:nvSpPr>
+          <p:cNvPr id="11" name="TextBox 10"/>
+          <p:cNvSpPr txBox="1"/>
+          <p:nvPr/>
+        </p:nvSpPr>
+        <p:spPr>
+          <a:xfrm>
+            <a:off x="6562191" y="2130552"/>
+            <a:ext cx="4696815" cy="274320"/>
+          </a:xfrm>
+          <a:prstGeom prst="rect">
+            <a:avLst/>
+          </a:prstGeom>
+          <a:noFill/>
+        </p:spPr>
+        <p:txBody>
+          <a:bodyPr wrap="square" lIns="0" rIns="0" tIns="0" bIns="0" anchor="t">
+            <a:spAutoFit/>
+          </a:bodyPr>
+          <a:lstStyle/>
+          <a:p>
+            <a:pPr algn="l">
+              <a:lnSpc>
+                <a:spcPct val="135000"/>
+              </a:lnSpc>
+            </a:pPr>
+            <a:r>
+              <a:rPr sz="1300" b="1" i="0" spc="156">
+                <a:solidFill>
+                  <a:srgbClr val="07734A"/>
+                </a:solidFill>
+                <a:latin typeface="Verdana"/>
+              </a:rPr>
+              <a:t>IL FAUT DIRE PLUTÔT</a:t>
+            </a:r>
+          </a:p>
+        </p:txBody>
+      </p:sp>
+      <p:sp>
+        <p:nvSpPr>
+          <p:cNvPr id="12" name="TextBox 11"/>
+          <p:cNvSpPr txBox="1"/>
+          <p:nvPr/>
+        </p:nvSpPr>
+        <p:spPr>
+          <a:xfrm>
+            <a:off x="6562191" y="2569464"/>
+            <a:ext cx="4696815" cy="1417320"/>
+          </a:xfrm>
+          <a:prstGeom prst="rect">
+            <a:avLst/>
+          </a:prstGeom>
+          <a:noFill/>
+        </p:spPr>
+        <p:txBody>
+          <a:bodyPr wrap="square" lIns="0" rIns="0" tIns="0" bIns="0" anchor="t">
+            <a:spAutoFit/>
+          </a:bodyPr>
+          <a:lstStyle/>
+          <a:p>
+            <a:pPr algn="l">
+              <a:lnSpc>
+                <a:spcPct val="130000"/>
+              </a:lnSpc>
+            </a:pPr>
+            <a:r>
+              <a:rPr sz="2400" b="1" i="0">
+                <a:solidFill>
+                  <a:srgbClr val="17181A"/>
+                </a:solidFill>
+                <a:latin typeface="Verdana"/>
+              </a:rPr>
+              <a:t>« Le matériel est ouvert : on prend une séance, on la change, on la dépose. »</a:t>
+            </a:r>
+          </a:p>
+        </p:txBody>
+      </p:sp>
+      <p:sp>
+        <p:nvSpPr>
+          <p:cNvPr id="13" name="Rounded Rectangle 12"/>
+          <p:cNvSpPr/>
+          <p:nvPr/>
+        </p:nvSpPr>
+        <p:spPr>
+          <a:xfrm>
+            <a:off x="566928" y="4462272"/>
+            <a:ext cx="11057839" cy="1618487"/>
+          </a:xfrm>
+          <a:prstGeom prst="roundRect">
+            <a:avLst>
+              <a:gd name="adj" fmla="val 9039"/>
+            </a:avLst>
+          </a:prstGeom>
+          <a:solidFill>
+            <a:srgbClr val="FFFFFF"/>
+          </a:solidFill>
+          <a:ln w="12700">
+            <a:solidFill>
+              <a:srgbClr val="EAEAE8"/>
+            </a:solidFill>
+          </a:ln>
+          <a:effectLst/>
+        </p:spPr>
+        <p:style>
+          <a:lnRef idx="1">
+            <a:schemeClr val="accent1"/>
+          </a:lnRef>
+          <a:fillRef idx="3">
+            <a:schemeClr val="accent1"/>
+          </a:fillRef>
+          <a:effectRef idx="2">
+            <a:schemeClr val="accent1"/>
+          </a:effectRef>
+          <a:fontRef idx="minor">
+            <a:schemeClr val="lt1"/>
+          </a:fontRef>
+        </p:style>
+        <p:txBody>
+          <a:bodyPr rtlCol="0" anchor="ctr"/>
+          <a:lstStyle/>
+          <a:p/>
+        </p:txBody>
+      </p:sp>
+      <p:sp>
+        <p:nvSpPr>
+          <p:cNvPr id="14" name="TextBox 13"/>
+          <p:cNvSpPr txBox="1"/>
+          <p:nvPr/>
+        </p:nvSpPr>
+        <p:spPr>
+          <a:xfrm>
+            <a:off x="969264" y="4736592"/>
+            <a:ext cx="10234879" cy="1150620"/>
+          </a:xfrm>
+          <a:prstGeom prst="rect">
+            <a:avLst/>
+          </a:prstGeom>
+          <a:noFill/>
+        </p:spPr>
+        <p:txBody>
+          <a:bodyPr wrap="square" lIns="0" rIns="0" tIns="0" bIns="0" anchor="t">
+            <a:spAutoFit/>
+          </a:bodyPr>
+          <a:lstStyle/>
+          <a:p>
+            <a:pPr algn="l">
+              <a:lnSpc>
+                <a:spcPct val="145000"/>
+              </a:lnSpc>
+            </a:pPr>
+            <a:r>
+              <a:rPr sz="2000" b="0" i="0">
+                <a:solidFill>
+                  <a:srgbClr val="4B4F52"/>
+                </a:solidFill>
+                <a:latin typeface="Verdana"/>
+              </a:rPr>
+              <a:t>Le dépôt accepte la version d'un enseignant à côté de l'officielle, sans jamais l'écraser. Ce n'est pas un manuel fermé : c'est un point de départ qui existe le lundi matin.</a:t>
+            </a:r>
+          </a:p>
+        </p:txBody>
+      </p:sp>
+    </p:spTree>
+  </p:cSld>
+  <p:clrMapOvr>
+    <a:masterClrMapping/>
+  </p:clrMapOvr>
+</p:sld>
+</file>
+
+<file path=ppt/slides/slide12.xml><?xml version="1.0" encoding="utf-8"?>
+<p:sld xmlns:a="http://schemas.openxmlformats.org/drawingml/2006/main" xmlns:p="http://schemas.openxmlformats.org/presentationml/2006/main" xmlns:r="http://schemas.openxmlformats.org/officeDocument/2006/relationships">
+  <p:cSld>
+    <p:spTree>
+      <p:nvGrpSpPr>
+        <p:cNvPr id="1" name=""/>
+        <p:cNvGrpSpPr/>
+        <p:nvPr/>
+      </p:nvGrpSpPr>
+      <p:grpSpPr/>
+      <p:sp>
+        <p:nvSpPr>
+          <p:cNvPr id="2" name="Rectangle 1"/>
+          <p:cNvSpPr/>
+          <p:nvPr/>
+        </p:nvSpPr>
+        <p:spPr>
+          <a:xfrm>
+            <a:off x="0" y="0"/>
+            <a:ext cx="12191695" cy="6858000"/>
+          </a:xfrm>
+          <a:prstGeom prst="rect">
+            <a:avLst/>
+          </a:prstGeom>
+          <a:solidFill>
+            <a:srgbClr val="F7F7F5"/>
+          </a:solidFill>
+          <a:ln>
+            <a:noFill/>
+          </a:ln>
+          <a:effectLst/>
+        </p:spPr>
+        <p:style>
+          <a:lnRef idx="1">
+            <a:schemeClr val="accent1"/>
+          </a:lnRef>
+          <a:fillRef idx="3">
+            <a:schemeClr val="accent1"/>
+          </a:fillRef>
+          <a:effectRef idx="2">
+            <a:schemeClr val="accent1"/>
+          </a:effectRef>
+          <a:fontRef idx="minor">
+            <a:schemeClr val="lt1"/>
+          </a:fontRef>
+        </p:style>
+        <p:txBody>
+          <a:bodyPr rtlCol="0" anchor="ctr"/>
+          <a:lstStyle/>
+          <a:p/>
+        </p:txBody>
+      </p:sp>
+      <p:sp>
+        <p:nvSpPr>
+          <p:cNvPr id="3" name="TextBox 2"/>
+          <p:cNvSpPr txBox="1"/>
+          <p:nvPr/>
+        </p:nvSpPr>
+        <p:spPr>
+          <a:xfrm>
+            <a:off x="566928" y="6355080"/>
+            <a:ext cx="6400800" cy="219456"/>
+          </a:xfrm>
+          <a:prstGeom prst="rect">
+            <a:avLst/>
+          </a:prstGeom>
+          <a:noFill/>
+        </p:spPr>
+        <p:txBody>
+          <a:bodyPr wrap="square" lIns="0" rIns="0" tIns="0" bIns="0" anchor="t">
+            <a:spAutoFit/>
+          </a:bodyPr>
+          <a:lstStyle/>
+          <a:p>
+            <a:pPr algn="l">
+              <a:lnSpc>
+                <a:spcPct val="135000"/>
+              </a:lnSpc>
+            </a:pPr>
+            <a:r>
+              <a:rPr sz="1200" b="0" i="0">
+                <a:solidFill>
+                  <a:srgbClr val="6E7175"/>
+                </a:solidFill>
+                <a:latin typeface="Verdana"/>
+              </a:rPr>
+              <a:t>P1 · francis · présentation</a:t>
+            </a:r>
+          </a:p>
+        </p:txBody>
+      </p:sp>
+      <p:sp>
+        <p:nvSpPr>
+          <p:cNvPr id="4" name="TextBox 3"/>
+          <p:cNvSpPr txBox="1"/>
+          <p:nvPr/>
+        </p:nvSpPr>
+        <p:spPr>
+          <a:xfrm>
+            <a:off x="10710367" y="6355080"/>
+            <a:ext cx="914400" cy="219456"/>
+          </a:xfrm>
+          <a:prstGeom prst="rect">
+            <a:avLst/>
+          </a:prstGeom>
+          <a:noFill/>
+        </p:spPr>
+        <p:txBody>
+          <a:bodyPr wrap="square" lIns="0" rIns="0" tIns="0" bIns="0" anchor="t">
+            <a:spAutoFit/>
+          </a:bodyPr>
+          <a:lstStyle/>
+          <a:p>
+            <a:pPr algn="r">
+              <a:lnSpc>
+                <a:spcPct val="135000"/>
+              </a:lnSpc>
+            </a:pPr>
+            <a:r>
+              <a:rPr sz="1200" b="0" i="0">
+                <a:solidFill>
+                  <a:srgbClr val="6E7175"/>
+                </a:solidFill>
+                <a:latin typeface="Verdana"/>
+              </a:rPr>
+              <a:t>12</a:t>
+            </a:r>
+          </a:p>
+        </p:txBody>
+      </p:sp>
+      <p:sp>
+        <p:nvSpPr>
           <p:cNvPr id="5" name="Rectangle 4"/>
           <p:cNvSpPr/>
           <p:nvPr/>
@@ -8528,7 +9544,7 @@
                 </a:solidFill>
                 <a:latin typeface="Verdana"/>
               </a:rPr>
-              <a:t>DANS UN MODULE</a:t>
+              <a:t>CE QUE L'ENSEIGNANT OUVRE</a:t>
             </a:r>
           </a:p>
         </p:txBody>
@@ -8561,31 +9577,70 @@
               </a:lnSpc>
             </a:pPr>
             <a:r>
-              <a:rPr sz="2800" b="1" i="0">
+              <a:rPr sz="3400" b="1" i="0">
                 <a:solidFill>
                   <a:srgbClr val="17181A"/>
                 </a:solidFill>
                 <a:latin typeface="Verdana"/>
               </a:rPr>
-              <a:t>Ce que l'élève trouve, et ce qu'il ne trouve pas ailleurs</a:t>
-            </a:r>
-          </a:p>
-        </p:txBody>
-      </p:sp>
-      <p:sp>
-        <p:nvSpPr>
-          <p:cNvPr id="7" name="Rounded Rectangle 6"/>
+              <a:t>Le dépôt de matériel</a:t>
+            </a:r>
+          </a:p>
+        </p:txBody>
+      </p:sp>
+      <p:sp>
+        <p:nvSpPr>
+          <p:cNvPr id="7" name="TextBox 6"/>
+          <p:cNvSpPr txBox="1"/>
+          <p:nvPr/>
+        </p:nvSpPr>
+        <p:spPr>
+          <a:xfrm>
+            <a:off x="566928" y="1645920"/>
+            <a:ext cx="11057839" cy="617220"/>
+          </a:xfrm>
+          <a:prstGeom prst="rect">
+            <a:avLst/>
+          </a:prstGeom>
+          <a:noFill/>
+        </p:spPr>
+        <p:txBody>
+          <a:bodyPr wrap="square" lIns="0" rIns="0" tIns="0" bIns="0" anchor="t">
+            <a:spAutoFit/>
+          </a:bodyPr>
+          <a:lstStyle/>
+          <a:p>
+            <a:pPr algn="l">
+              <a:lnSpc>
+                <a:spcPct val="135000"/>
+              </a:lnSpc>
+            </a:pPr>
+            <a:r>
+              <a:rPr sz="1800" b="0" i="0">
+                <a:solidFill>
+                  <a:srgbClr val="6E7175"/>
+                </a:solidFill>
+                <a:latin typeface="Verdana"/>
+              </a:rPr>
+              <a:t>Diaporamas et fiches au même endroit, filtrés par bloc. « 16 séances équipées sur 16 » : rien à préparer.</a:t>
+            </a:r>
+          </a:p>
+        </p:txBody>
+      </p:sp>
+      <p:sp>
+        <p:nvSpPr>
+          <p:cNvPr id="8" name="Rounded Rectangle 7"/>
           <p:cNvSpPr/>
           <p:nvPr/>
         </p:nvSpPr>
         <p:spPr>
           <a:xfrm>
-            <a:off x="566928" y="1810512"/>
-            <a:ext cx="5446623" cy="2052828"/>
+            <a:off x="4638932" y="2372868"/>
+            <a:ext cx="2913830" cy="3799332"/>
           </a:xfrm>
           <a:prstGeom prst="roundRect">
             <a:avLst>
-              <a:gd name="adj" fmla="val 7126"/>
+              <a:gd name="adj" fmla="val 3138"/>
             </a:avLst>
           </a:prstGeom>
           <a:solidFill>
@@ -8593,7 +9648,7 @@
           </a:solidFill>
           <a:ln w="12700">
             <a:solidFill>
-              <a:srgbClr val="EAEAE8"/>
+              <a:srgbClr val="D6D6D2"/>
             </a:solidFill>
           </a:ln>
           <a:effectLst/>
@@ -8618,456 +9673,30 @@
           <a:p/>
         </p:txBody>
       </p:sp>
-      <p:sp>
-        <p:nvSpPr>
-          <p:cNvPr id="8" name="TextBox 7"/>
-          <p:cNvSpPr txBox="1"/>
-          <p:nvPr/>
-        </p:nvSpPr>
-        <p:spPr>
-          <a:xfrm>
-            <a:off x="886968" y="2084831"/>
-            <a:ext cx="4806543" cy="297179"/>
-          </a:xfrm>
-          <a:prstGeom prst="rect">
-            <a:avLst/>
-          </a:prstGeom>
-          <a:noFill/>
-        </p:spPr>
-        <p:txBody>
-          <a:bodyPr wrap="square" lIns="0" rIns="0" tIns="0" bIns="0" anchor="t">
-            <a:spAutoFit/>
-          </a:bodyPr>
-          <a:lstStyle/>
-          <a:p>
-            <a:pPr algn="l">
-              <a:lnSpc>
-                <a:spcPct val="118000"/>
-              </a:lnSpc>
-            </a:pPr>
-            <a:r>
-              <a:rPr sz="1800" b="1" i="0">
-                <a:solidFill>
-                  <a:srgbClr val="0D7A6F"/>
-                </a:solidFill>
-                <a:latin typeface="Verdana"/>
-              </a:rPr>
-              <a:t>Des voix, pas une lecture</a:t>
-            </a:r>
-          </a:p>
-        </p:txBody>
-      </p:sp>
-      <p:sp>
-        <p:nvSpPr>
-          <p:cNvPr id="9" name="TextBox 8"/>
-          <p:cNvSpPr txBox="1"/>
-          <p:nvPr/>
-        </p:nvSpPr>
-        <p:spPr>
-          <a:xfrm>
-            <a:off x="886968" y="2409444"/>
-            <a:ext cx="4806543" cy="1179576"/>
-          </a:xfrm>
-          <a:prstGeom prst="rect">
-            <a:avLst/>
-          </a:prstGeom>
-          <a:noFill/>
-        </p:spPr>
-        <p:txBody>
-          <a:bodyPr wrap="square" lIns="0" rIns="0" tIns="0" bIns="0" anchor="t">
-            <a:spAutoFit/>
-          </a:bodyPr>
-          <a:lstStyle/>
-          <a:p>
-            <a:pPr algn="l">
-              <a:lnSpc>
-                <a:spcPct val="142000"/>
-              </a:lnSpc>
-            </a:pPr>
-            <a:r>
-              <a:rPr sz="1400" b="0" i="0">
-                <a:solidFill>
-                  <a:srgbClr val="3A3D40"/>
-                </a:solidFill>
-                <a:latin typeface="Verdana"/>
-              </a:rPr>
-              <a:t>Chaque dialogue est enregistré par des voix différentes, au débit qu'on choisit. 21 403 pistes audio produites.</a:t>
-            </a:r>
-          </a:p>
-        </p:txBody>
-      </p:sp>
-      <p:sp>
-        <p:nvSpPr>
-          <p:cNvPr id="10" name="Rounded Rectangle 9"/>
-          <p:cNvSpPr/>
-          <p:nvPr/>
-        </p:nvSpPr>
-        <p:spPr>
-          <a:xfrm>
-            <a:off x="6178143" y="1810512"/>
-            <a:ext cx="5446623" cy="2052828"/>
-          </a:xfrm>
-          <a:prstGeom prst="roundRect">
-            <a:avLst>
-              <a:gd name="adj" fmla="val 7126"/>
-            </a:avLst>
-          </a:prstGeom>
-          <a:solidFill>
-            <a:srgbClr val="FFFFFF"/>
-          </a:solidFill>
-          <a:ln w="12700">
-            <a:solidFill>
-              <a:srgbClr val="EAEAE8"/>
-            </a:solidFill>
-          </a:ln>
-          <a:effectLst/>
-        </p:spPr>
-        <p:style>
-          <a:lnRef idx="1">
-            <a:schemeClr val="accent1"/>
-          </a:lnRef>
-          <a:fillRef idx="3">
-            <a:schemeClr val="accent1"/>
-          </a:fillRef>
-          <a:effectRef idx="2">
-            <a:schemeClr val="accent1"/>
-          </a:effectRef>
-          <a:fontRef idx="minor">
-            <a:schemeClr val="lt1"/>
-          </a:fontRef>
-        </p:style>
-        <p:txBody>
-          <a:bodyPr rtlCol="0" anchor="ctr"/>
-          <a:lstStyle/>
-          <a:p/>
-        </p:txBody>
-      </p:sp>
-      <p:sp>
-        <p:nvSpPr>
-          <p:cNvPr id="11" name="TextBox 10"/>
-          <p:cNvSpPr txBox="1"/>
-          <p:nvPr/>
-        </p:nvSpPr>
-        <p:spPr>
-          <a:xfrm>
-            <a:off x="6498183" y="2084831"/>
-            <a:ext cx="4806543" cy="297179"/>
-          </a:xfrm>
-          <a:prstGeom prst="rect">
-            <a:avLst/>
-          </a:prstGeom>
-          <a:noFill/>
-        </p:spPr>
-        <p:txBody>
-          <a:bodyPr wrap="square" lIns="0" rIns="0" tIns="0" bIns="0" anchor="t">
-            <a:spAutoFit/>
-          </a:bodyPr>
-          <a:lstStyle/>
-          <a:p>
-            <a:pPr algn="l">
-              <a:lnSpc>
-                <a:spcPct val="118000"/>
-              </a:lnSpc>
-            </a:pPr>
-            <a:r>
-              <a:rPr sz="1800" b="1" i="0">
-                <a:solidFill>
-                  <a:srgbClr val="0D7A6F"/>
-                </a:solidFill>
-                <a:latin typeface="Verdana"/>
-              </a:rPr>
-              <a:t>Sept familles d'exercices</a:t>
-            </a:r>
-          </a:p>
-        </p:txBody>
-      </p:sp>
-      <p:sp>
-        <p:nvSpPr>
-          <p:cNvPr id="12" name="TextBox 11"/>
-          <p:cNvSpPr txBox="1"/>
-          <p:nvPr/>
-        </p:nvSpPr>
-        <p:spPr>
-          <a:xfrm>
-            <a:off x="6498183" y="2409444"/>
-            <a:ext cx="4806543" cy="1179576"/>
-          </a:xfrm>
-          <a:prstGeom prst="rect">
-            <a:avLst/>
-          </a:prstGeom>
-          <a:noFill/>
-        </p:spPr>
-        <p:txBody>
-          <a:bodyPr wrap="square" lIns="0" rIns="0" tIns="0" bIns="0" anchor="t">
-            <a:spAutoFit/>
-          </a:bodyPr>
-          <a:lstStyle/>
-          <a:p>
-            <a:pPr algn="l">
-              <a:lnSpc>
-                <a:spcPct val="142000"/>
-              </a:lnSpc>
-            </a:pPr>
-            <a:r>
-              <a:rPr sz="1400" b="0" i="0">
-                <a:solidFill>
-                  <a:srgbClr val="3A3D40"/>
-                </a:solidFill>
-                <a:latin typeface="Verdana"/>
-              </a:rPr>
-              <a:t>Vrai ou faux, association, cases à écrire, texte à trous, images, question ouverte, tableau. Pas une de plus : l'élève apprend une fois comment on répond.</a:t>
-            </a:r>
-          </a:p>
-        </p:txBody>
-      </p:sp>
-      <p:sp>
-        <p:nvSpPr>
-          <p:cNvPr id="13" name="Rounded Rectangle 12"/>
-          <p:cNvSpPr/>
-          <p:nvPr/>
-        </p:nvSpPr>
-        <p:spPr>
-          <a:xfrm>
-            <a:off x="566928" y="4027932"/>
-            <a:ext cx="5446623" cy="2052828"/>
-          </a:xfrm>
-          <a:prstGeom prst="roundRect">
-            <a:avLst>
-              <a:gd name="adj" fmla="val 7126"/>
-            </a:avLst>
-          </a:prstGeom>
-          <a:solidFill>
-            <a:srgbClr val="FFFFFF"/>
-          </a:solidFill>
-          <a:ln w="12700">
-            <a:solidFill>
-              <a:srgbClr val="EAEAE8"/>
-            </a:solidFill>
-          </a:ln>
-          <a:effectLst/>
-        </p:spPr>
-        <p:style>
-          <a:lnRef idx="1">
-            <a:schemeClr val="accent1"/>
-          </a:lnRef>
-          <a:fillRef idx="3">
-            <a:schemeClr val="accent1"/>
-          </a:fillRef>
-          <a:effectRef idx="2">
-            <a:schemeClr val="accent1"/>
-          </a:effectRef>
-          <a:fontRef idx="minor">
-            <a:schemeClr val="lt1"/>
-          </a:fontRef>
-        </p:style>
-        <p:txBody>
-          <a:bodyPr rtlCol="0" anchor="ctr"/>
-          <a:lstStyle/>
-          <a:p/>
-        </p:txBody>
-      </p:sp>
-      <p:sp>
-        <p:nvSpPr>
-          <p:cNvPr id="14" name="TextBox 13"/>
-          <p:cNvSpPr txBox="1"/>
-          <p:nvPr/>
-        </p:nvSpPr>
-        <p:spPr>
-          <a:xfrm>
-            <a:off x="886968" y="4302252"/>
-            <a:ext cx="4806543" cy="297179"/>
-          </a:xfrm>
-          <a:prstGeom prst="rect">
-            <a:avLst/>
-          </a:prstGeom>
-          <a:noFill/>
-        </p:spPr>
-        <p:txBody>
-          <a:bodyPr wrap="square" lIns="0" rIns="0" tIns="0" bIns="0" anchor="t">
-            <a:spAutoFit/>
-          </a:bodyPr>
-          <a:lstStyle/>
-          <a:p>
-            <a:pPr algn="l">
-              <a:lnSpc>
-                <a:spcPct val="118000"/>
-              </a:lnSpc>
-            </a:pPr>
-            <a:r>
-              <a:rPr sz="1800" b="1" i="0">
-                <a:solidFill>
-                  <a:srgbClr val="0D7A6F"/>
-                </a:solidFill>
-                <a:latin typeface="Verdana"/>
-              </a:rPr>
-              <a:t>Des mini-leçons</a:t>
-            </a:r>
-          </a:p>
-        </p:txBody>
-      </p:sp>
-      <p:sp>
-        <p:nvSpPr>
-          <p:cNvPr id="15" name="TextBox 14"/>
-          <p:cNvSpPr txBox="1"/>
-          <p:nvPr/>
-        </p:nvSpPr>
-        <p:spPr>
-          <a:xfrm>
-            <a:off x="886968" y="4626864"/>
-            <a:ext cx="4806543" cy="1179576"/>
-          </a:xfrm>
-          <a:prstGeom prst="rect">
-            <a:avLst/>
-          </a:prstGeom>
-          <a:noFill/>
-        </p:spPr>
-        <p:txBody>
-          <a:bodyPr wrap="square" lIns="0" rIns="0" tIns="0" bIns="0" anchor="t">
-            <a:spAutoFit/>
-          </a:bodyPr>
-          <a:lstStyle/>
-          <a:p>
-            <a:pPr algn="l">
-              <a:lnSpc>
-                <a:spcPct val="142000"/>
-              </a:lnSpc>
-            </a:pPr>
-            <a:r>
-              <a:rPr sz="1400" b="0" i="0">
-                <a:solidFill>
-                  <a:srgbClr val="3A3D40"/>
-                </a:solidFill>
-                <a:latin typeface="Verdana"/>
-              </a:rPr>
-              <a:t>La règle avec ses exemples, ouverte au moment où l'élève se trompe, pas au début du chapitre.</a:t>
-            </a:r>
-          </a:p>
-        </p:txBody>
-      </p:sp>
-      <p:sp>
-        <p:nvSpPr>
-          <p:cNvPr id="16" name="Rounded Rectangle 15"/>
-          <p:cNvSpPr/>
-          <p:nvPr/>
-        </p:nvSpPr>
-        <p:spPr>
-          <a:xfrm>
-            <a:off x="6178143" y="4027932"/>
-            <a:ext cx="5446623" cy="2052828"/>
-          </a:xfrm>
-          <a:prstGeom prst="roundRect">
-            <a:avLst>
-              <a:gd name="adj" fmla="val 7126"/>
-            </a:avLst>
-          </a:prstGeom>
-          <a:solidFill>
-            <a:srgbClr val="FFFFFF"/>
-          </a:solidFill>
-          <a:ln w="12700">
-            <a:solidFill>
-              <a:srgbClr val="EAEAE8"/>
-            </a:solidFill>
-          </a:ln>
-          <a:effectLst/>
-        </p:spPr>
-        <p:style>
-          <a:lnRef idx="1">
-            <a:schemeClr val="accent1"/>
-          </a:lnRef>
-          <a:fillRef idx="3">
-            <a:schemeClr val="accent1"/>
-          </a:fillRef>
-          <a:effectRef idx="2">
-            <a:schemeClr val="accent1"/>
-          </a:effectRef>
-          <a:fontRef idx="minor">
-            <a:schemeClr val="lt1"/>
-          </a:fontRef>
-        </p:style>
-        <p:txBody>
-          <a:bodyPr rtlCol="0" anchor="ctr"/>
-          <a:lstStyle/>
-          <a:p/>
-        </p:txBody>
-      </p:sp>
-      <p:sp>
-        <p:nvSpPr>
-          <p:cNvPr id="17" name="TextBox 16"/>
-          <p:cNvSpPr txBox="1"/>
-          <p:nvPr/>
-        </p:nvSpPr>
-        <p:spPr>
-          <a:xfrm>
-            <a:off x="6498183" y="4302252"/>
-            <a:ext cx="4806543" cy="297179"/>
-          </a:xfrm>
-          <a:prstGeom prst="rect">
-            <a:avLst/>
-          </a:prstGeom>
-          <a:noFill/>
-        </p:spPr>
-        <p:txBody>
-          <a:bodyPr wrap="square" lIns="0" rIns="0" tIns="0" bIns="0" anchor="t">
-            <a:spAutoFit/>
-          </a:bodyPr>
-          <a:lstStyle/>
-          <a:p>
-            <a:pPr algn="l">
-              <a:lnSpc>
-                <a:spcPct val="118000"/>
-              </a:lnSpc>
-            </a:pPr>
-            <a:r>
-              <a:rPr sz="1800" b="1" i="0">
-                <a:solidFill>
-                  <a:srgbClr val="0D7A6F"/>
-                </a:solidFill>
-                <a:latin typeface="Verdana"/>
-              </a:rPr>
-              <a:t>Des images produites pour la scène</a:t>
-            </a:r>
-          </a:p>
-        </p:txBody>
-      </p:sp>
-      <p:sp>
-        <p:nvSpPr>
-          <p:cNvPr id="18" name="TextBox 17"/>
-          <p:cNvSpPr txBox="1"/>
-          <p:nvPr/>
-        </p:nvSpPr>
-        <p:spPr>
-          <a:xfrm>
-            <a:off x="6498183" y="4626864"/>
-            <a:ext cx="4806543" cy="1179576"/>
-          </a:xfrm>
-          <a:prstGeom prst="rect">
-            <a:avLst/>
-          </a:prstGeom>
-          <a:noFill/>
-        </p:spPr>
-        <p:txBody>
-          <a:bodyPr wrap="square" lIns="0" rIns="0" tIns="0" bIns="0" anchor="t">
-            <a:spAutoFit/>
-          </a:bodyPr>
-          <a:lstStyle/>
-          <a:p>
-            <a:pPr algn="l">
-              <a:lnSpc>
-                <a:spcPct val="142000"/>
-              </a:lnSpc>
-            </a:pPr>
-            <a:r>
-              <a:rPr sz="1400" b="0" i="0">
-                <a:solidFill>
-                  <a:srgbClr val="3A3D40"/>
-                </a:solidFill>
-                <a:latin typeface="Verdana"/>
-              </a:rPr>
-              <a:t>1 502 images, cadrées pour la situation du module — jamais une banque d'images décorative.</a:t>
-            </a:r>
-          </a:p>
-        </p:txBody>
-      </p:sp>
+      <p:pic>
+        <p:nvPicPr>
+          <p:cNvPr id="9" name="Picture 8" descr="mat-05-materiel-catalogue.png"/>
+          <p:cNvPicPr>
+            <a:picLocks noChangeAspect="1"/>
+          </p:cNvPicPr>
+          <p:nvPr/>
+        </p:nvPicPr>
+        <p:blipFill>
+          <a:blip r:embed="rId2"/>
+          <a:stretch>
+            <a:fillRect/>
+          </a:stretch>
+        </p:blipFill>
+        <p:spPr>
+          <a:xfrm>
+            <a:off x="4657220" y="2391156"/>
+            <a:ext cx="2877254" cy="3762756"/>
+          </a:xfrm>
+          <a:prstGeom prst="rect">
+            <a:avLst/>
+          </a:prstGeom>
+        </p:spPr>
+      </p:pic>
     </p:spTree>
   </p:cSld>
   <p:clrMapOvr>
@@ -9240,7 +9869,7 @@
                 </a:solidFill>
                 <a:latin typeface="Verdana"/>
               </a:rPr>
-              <a:t>POUR VOUS</a:t>
+              <a:t>DANS UN MODULE</a:t>
             </a:r>
           </a:p>
         </p:txBody>
@@ -9273,13 +9902,13 @@
               </a:lnSpc>
             </a:pPr>
             <a:r>
-              <a:rPr sz="3400" b="1" i="0">
+              <a:rPr sz="2800" b="1" i="0">
                 <a:solidFill>
                   <a:srgbClr val="17181A"/>
                 </a:solidFill>
                 <a:latin typeface="Verdana"/>
               </a:rPr>
-              <a:t>Le diaporama d'une séance, bloc par bloc</a:t>
+              <a:t>Ce que l'élève trouve, et ce qu'il ne trouve pas ailleurs</a:t>
             </a:r>
           </a:p>
         </p:txBody>
@@ -9339,7 +9968,7 @@
         <p:spPr>
           <a:xfrm>
             <a:off x="886968" y="2084831"/>
-            <a:ext cx="4806543" cy="387096"/>
+            <a:ext cx="4806543" cy="297179"/>
           </a:xfrm>
           <a:prstGeom prst="rect">
             <a:avLst/>
@@ -9358,13 +9987,13 @@
               </a:lnSpc>
             </a:pPr>
             <a:r>
-              <a:rPr sz="2400" b="1" i="0">
+              <a:rPr sz="1800" b="1" i="0">
                 <a:solidFill>
                   <a:srgbClr val="0D7A6F"/>
                 </a:solidFill>
                 <a:latin typeface="Verdana"/>
               </a:rPr>
-              <a:t>La règle</a:t>
+              <a:t>Des voix, pas une lecture</a:t>
             </a:r>
           </a:p>
         </p:txBody>
@@ -9377,8 +10006,8 @@
         </p:nvSpPr>
         <p:spPr>
           <a:xfrm>
-            <a:off x="886968" y="2499360"/>
-            <a:ext cx="4806543" cy="1089660"/>
+            <a:off x="886968" y="2409444"/>
+            <a:ext cx="4806543" cy="1179576"/>
           </a:xfrm>
           <a:prstGeom prst="rect">
             <a:avLst/>
@@ -9397,13 +10026,13 @@
               </a:lnSpc>
             </a:pPr>
             <a:r>
-              <a:rPr sz="1800" b="0" i="0">
+              <a:rPr sz="1400" b="0" i="0">
                 <a:solidFill>
                   <a:srgbClr val="3A3D40"/>
                 </a:solidFill>
                 <a:latin typeface="Verdana"/>
               </a:rPr>
-              <a:t>un énoncé, gros, seul : la diapositive que les élèves photographient</a:t>
+              <a:t>Chaque dialogue est enregistré par des voix différentes, au débit qu'on choisit. 21 403 pistes audio produites.</a:t>
             </a:r>
           </a:p>
         </p:txBody>
@@ -9463,7 +10092,7 @@
         <p:spPr>
           <a:xfrm>
             <a:off x="6498183" y="2084831"/>
-            <a:ext cx="4806543" cy="387096"/>
+            <a:ext cx="4806543" cy="297179"/>
           </a:xfrm>
           <a:prstGeom prst="rect">
             <a:avLst/>
@@ -9482,13 +10111,13 @@
               </a:lnSpc>
             </a:pPr>
             <a:r>
-              <a:rPr sz="2400" b="1" i="0">
+              <a:rPr sz="1800" b="1" i="0">
                 <a:solidFill>
                   <a:srgbClr val="0D7A6F"/>
                 </a:solidFill>
                 <a:latin typeface="Verdana"/>
               </a:rPr>
-              <a:t>L'exercice projeté</a:t>
+              <a:t>Sept familles d'exercices</a:t>
             </a:r>
           </a:p>
         </p:txBody>
@@ -9501,8 +10130,8 @@
         </p:nvSpPr>
         <p:spPr>
           <a:xfrm>
-            <a:off x="6498183" y="2499360"/>
-            <a:ext cx="4806543" cy="1089660"/>
+            <a:off x="6498183" y="2409444"/>
+            <a:ext cx="4806543" cy="1179576"/>
           </a:xfrm>
           <a:prstGeom prst="rect">
             <a:avLst/>
@@ -9521,13 +10150,13 @@
               </a:lnSpc>
             </a:pPr>
             <a:r>
-              <a:rPr sz="1800" b="0" i="0">
+              <a:rPr sz="1400" b="0" i="0">
                 <a:solidFill>
                   <a:srgbClr val="3A3D40"/>
                 </a:solidFill>
                 <a:latin typeface="Verdana"/>
               </a:rPr>
-              <a:t>le même que dans le module, suivi de son corrigé, à la même place</a:t>
+              <a:t>Vrai ou faux, association, cases à écrire, texte à trous, images, question ouverte, tableau. Pas une de plus : l'élève apprend une fois comment on répond.</a:t>
             </a:r>
           </a:p>
         </p:txBody>
@@ -9587,7 +10216,7 @@
         <p:spPr>
           <a:xfrm>
             <a:off x="886968" y="4302252"/>
-            <a:ext cx="4806543" cy="387096"/>
+            <a:ext cx="4806543" cy="297179"/>
           </a:xfrm>
           <a:prstGeom prst="rect">
             <a:avLst/>
@@ -9606,13 +10235,13 @@
               </a:lnSpc>
             </a:pPr>
             <a:r>
-              <a:rPr sz="2400" b="1" i="0">
+              <a:rPr sz="1800" b="1" i="0">
                 <a:solidFill>
                   <a:srgbClr val="0D7A6F"/>
                 </a:solidFill>
                 <a:latin typeface="Verdana"/>
               </a:rPr>
-              <a:t>Le piège</a:t>
+              <a:t>Des mini-leçons</a:t>
             </a:r>
           </a:p>
         </p:txBody>
@@ -9625,8 +10254,8 @@
         </p:nvSpPr>
         <p:spPr>
           <a:xfrm>
-            <a:off x="886968" y="4716780"/>
-            <a:ext cx="4806543" cy="1089660"/>
+            <a:off x="886968" y="4626864"/>
+            <a:ext cx="4806543" cy="1179576"/>
           </a:xfrm>
           <a:prstGeom prst="rect">
             <a:avLst/>
@@ -9645,13 +10274,13 @@
               </a:lnSpc>
             </a:pPr>
             <a:r>
-              <a:rPr sz="1800" b="0" i="0">
+              <a:rPr sz="1400" b="0" i="0">
                 <a:solidFill>
                   <a:srgbClr val="3A3D40"/>
                 </a:solidFill>
                 <a:latin typeface="Verdana"/>
               </a:rPr>
-              <a:t>ce qu'on entend souvent, à côté de ce qu'il faut dire</a:t>
+              <a:t>La règle avec ses exemples, ouverte au moment où l'élève se trompe, pas au début du chapitre.</a:t>
             </a:r>
           </a:p>
         </p:txBody>
@@ -9711,7 +10340,7 @@
         <p:spPr>
           <a:xfrm>
             <a:off x="6498183" y="4302252"/>
-            <a:ext cx="4806543" cy="387096"/>
+            <a:ext cx="4806543" cy="297179"/>
           </a:xfrm>
           <a:prstGeom prst="rect">
             <a:avLst/>
@@ -9730,13 +10359,13 @@
               </a:lnSpc>
             </a:pPr>
             <a:r>
-              <a:rPr sz="2400" b="1" i="0">
+              <a:rPr sz="1800" b="1" i="0">
                 <a:solidFill>
                   <a:srgbClr val="0D7A6F"/>
                 </a:solidFill>
                 <a:latin typeface="Verdana"/>
               </a:rPr>
-              <a:t>Le billet de sortie</a:t>
+              <a:t>Des images produites pour la scène</a:t>
             </a:r>
           </a:p>
         </p:txBody>
@@ -9749,8 +10378,8 @@
         </p:nvSpPr>
         <p:spPr>
           <a:xfrm>
-            <a:off x="6498183" y="4716780"/>
-            <a:ext cx="4806543" cy="1089660"/>
+            <a:off x="6498183" y="4626864"/>
+            <a:ext cx="4806543" cy="1179576"/>
           </a:xfrm>
           <a:prstGeom prst="rect">
             <a:avLst/>
@@ -9769,13 +10398,13 @@
               </a:lnSpc>
             </a:pPr>
             <a:r>
-              <a:rPr sz="1800" b="0" i="0">
+              <a:rPr sz="1400" b="0" i="0">
                 <a:solidFill>
                   <a:srgbClr val="3A3D40"/>
                 </a:solidFill>
                 <a:latin typeface="Verdana"/>
               </a:rPr>
-              <a:t>la dernière diapositive, celle qui ferme la séance — 12 524 notes de présentateur en tout</a:t>
+              <a:t>1 502 images, cadrées pour la situation du module — jamais une banque d'images décorative.</a:t>
             </a:r>
           </a:p>
         </p:txBody>
@@ -9952,7 +10581,7 @@
                 </a:solidFill>
                 <a:latin typeface="Verdana"/>
               </a:rPr>
-              <a:t>CE QU'ON ENTEND</a:t>
+              <a:t>POUR VOUS</a:t>
             </a:r>
           </a:p>
         </p:txBody>
@@ -9991,7 +10620,7 @@
                 </a:solidFill>
                 <a:latin typeface="Verdana"/>
               </a:rPr>
-              <a:t>Le piège le plus fréquent</a:t>
+              <a:t>Le diaporama d'une séance, bloc par bloc</a:t>
             </a:r>
           </a:p>
         </p:txBody>
@@ -10004,260 +10633,12 @@
         </p:nvSpPr>
         <p:spPr>
           <a:xfrm>
-            <a:off x="566928" y="1856232"/>
-            <a:ext cx="5428335" cy="2331720"/>
+            <a:off x="566928" y="1810512"/>
+            <a:ext cx="5446623" cy="2052828"/>
           </a:xfrm>
           <a:prstGeom prst="roundRect">
             <a:avLst>
-              <a:gd name="adj" fmla="val 6274"/>
-            </a:avLst>
-          </a:prstGeom>
-          <a:solidFill>
-            <a:srgbClr val="FFF6F5"/>
-          </a:solidFill>
-          <a:ln w="12700">
-            <a:solidFill>
-              <a:srgbClr val="DC2626"/>
-            </a:solidFill>
-          </a:ln>
-          <a:effectLst/>
-        </p:spPr>
-        <p:style>
-          <a:lnRef idx="1">
-            <a:schemeClr val="accent1"/>
-          </a:lnRef>
-          <a:fillRef idx="3">
-            <a:schemeClr val="accent1"/>
-          </a:fillRef>
-          <a:effectRef idx="2">
-            <a:schemeClr val="accent1"/>
-          </a:effectRef>
-          <a:fontRef idx="minor">
-            <a:schemeClr val="lt1"/>
-          </a:fontRef>
-        </p:style>
-        <p:txBody>
-          <a:bodyPr rtlCol="0" anchor="ctr"/>
-          <a:lstStyle/>
-          <a:p/>
-        </p:txBody>
-      </p:sp>
-      <p:sp>
-        <p:nvSpPr>
-          <p:cNvPr id="8" name="TextBox 7"/>
-          <p:cNvSpPr txBox="1"/>
-          <p:nvPr/>
-        </p:nvSpPr>
-        <p:spPr>
-          <a:xfrm>
-            <a:off x="932688" y="2130552"/>
-            <a:ext cx="4696815" cy="274320"/>
-          </a:xfrm>
-          <a:prstGeom prst="rect">
-            <a:avLst/>
-          </a:prstGeom>
-          <a:noFill/>
-        </p:spPr>
-        <p:txBody>
-          <a:bodyPr wrap="square" lIns="0" rIns="0" tIns="0" bIns="0" anchor="t">
-            <a:spAutoFit/>
-          </a:bodyPr>
-          <a:lstStyle/>
-          <a:p>
-            <a:pPr algn="l">
-              <a:lnSpc>
-                <a:spcPct val="135000"/>
-              </a:lnSpc>
-            </a:pPr>
-            <a:r>
-              <a:rPr sz="1300" b="1" i="0" spc="156">
-                <a:solidFill>
-                  <a:srgbClr val="B91C1C"/>
-                </a:solidFill>
-                <a:latin typeface="Verdana"/>
-              </a:rPr>
-              <a:t>ON ENTEND SOUVENT</a:t>
-            </a:r>
-          </a:p>
-        </p:txBody>
-      </p:sp>
-      <p:sp>
-        <p:nvSpPr>
-          <p:cNvPr id="9" name="TextBox 8"/>
-          <p:cNvSpPr txBox="1"/>
-          <p:nvPr/>
-        </p:nvSpPr>
-        <p:spPr>
-          <a:xfrm>
-            <a:off x="932688" y="2569464"/>
-            <a:ext cx="4696815" cy="1417320"/>
-          </a:xfrm>
-          <a:prstGeom prst="rect">
-            <a:avLst/>
-          </a:prstGeom>
-          <a:noFill/>
-        </p:spPr>
-        <p:txBody>
-          <a:bodyPr wrap="square" lIns="0" rIns="0" tIns="0" bIns="0" anchor="t">
-            <a:spAutoFit/>
-          </a:bodyPr>
-          <a:lstStyle/>
-          <a:p>
-            <a:pPr algn="l">
-              <a:lnSpc>
-                <a:spcPct val="130000"/>
-              </a:lnSpc>
-            </a:pPr>
-            <a:r>
-              <a:rPr sz="2500" b="1" i="0">
-                <a:solidFill>
-                  <a:srgbClr val="17181A"/>
-                </a:solidFill>
-                <a:latin typeface="Verdana"/>
-              </a:rPr>
-              <a:t>« Du matériel tout fait, mes enseignants n'en voudront pas. »</a:t>
-            </a:r>
-          </a:p>
-        </p:txBody>
-      </p:sp>
-      <p:sp>
-        <p:nvSpPr>
-          <p:cNvPr id="10" name="Rounded Rectangle 9"/>
-          <p:cNvSpPr/>
-          <p:nvPr/>
-        </p:nvSpPr>
-        <p:spPr>
-          <a:xfrm>
-            <a:off x="6196431" y="1856232"/>
-            <a:ext cx="5428335" cy="2331720"/>
-          </a:xfrm>
-          <a:prstGeom prst="roundRect">
-            <a:avLst>
-              <a:gd name="adj" fmla="val 6274"/>
-            </a:avLst>
-          </a:prstGeom>
-          <a:solidFill>
-            <a:srgbClr val="E6F5EE"/>
-          </a:solidFill>
-          <a:ln w="12700">
-            <a:solidFill>
-              <a:srgbClr val="0A8F5B"/>
-            </a:solidFill>
-          </a:ln>
-          <a:effectLst/>
-        </p:spPr>
-        <p:style>
-          <a:lnRef idx="1">
-            <a:schemeClr val="accent1"/>
-          </a:lnRef>
-          <a:fillRef idx="3">
-            <a:schemeClr val="accent1"/>
-          </a:fillRef>
-          <a:effectRef idx="2">
-            <a:schemeClr val="accent1"/>
-          </a:effectRef>
-          <a:fontRef idx="minor">
-            <a:schemeClr val="lt1"/>
-          </a:fontRef>
-        </p:style>
-        <p:txBody>
-          <a:bodyPr rtlCol="0" anchor="ctr"/>
-          <a:lstStyle/>
-          <a:p/>
-        </p:txBody>
-      </p:sp>
-      <p:sp>
-        <p:nvSpPr>
-          <p:cNvPr id="11" name="TextBox 10"/>
-          <p:cNvSpPr txBox="1"/>
-          <p:nvPr/>
-        </p:nvSpPr>
-        <p:spPr>
-          <a:xfrm>
-            <a:off x="6562191" y="2130552"/>
-            <a:ext cx="4696815" cy="274320"/>
-          </a:xfrm>
-          <a:prstGeom prst="rect">
-            <a:avLst/>
-          </a:prstGeom>
-          <a:noFill/>
-        </p:spPr>
-        <p:txBody>
-          <a:bodyPr wrap="square" lIns="0" rIns="0" tIns="0" bIns="0" anchor="t">
-            <a:spAutoFit/>
-          </a:bodyPr>
-          <a:lstStyle/>
-          <a:p>
-            <a:pPr algn="l">
-              <a:lnSpc>
-                <a:spcPct val="135000"/>
-              </a:lnSpc>
-            </a:pPr>
-            <a:r>
-              <a:rPr sz="1300" b="1" i="0" spc="156">
-                <a:solidFill>
-                  <a:srgbClr val="07734A"/>
-                </a:solidFill>
-                <a:latin typeface="Verdana"/>
-              </a:rPr>
-              <a:t>IL FAUT DIRE PLUTÔT</a:t>
-            </a:r>
-          </a:p>
-        </p:txBody>
-      </p:sp>
-      <p:sp>
-        <p:nvSpPr>
-          <p:cNvPr id="12" name="TextBox 11"/>
-          <p:cNvSpPr txBox="1"/>
-          <p:nvPr/>
-        </p:nvSpPr>
-        <p:spPr>
-          <a:xfrm>
-            <a:off x="6562191" y="2569464"/>
-            <a:ext cx="4696815" cy="1417320"/>
-          </a:xfrm>
-          <a:prstGeom prst="rect">
-            <a:avLst/>
-          </a:prstGeom>
-          <a:noFill/>
-        </p:spPr>
-        <p:txBody>
-          <a:bodyPr wrap="square" lIns="0" rIns="0" tIns="0" bIns="0" anchor="t">
-            <a:spAutoFit/>
-          </a:bodyPr>
-          <a:lstStyle/>
-          <a:p>
-            <a:pPr algn="l">
-              <a:lnSpc>
-                <a:spcPct val="130000"/>
-              </a:lnSpc>
-            </a:pPr>
-            <a:r>
-              <a:rPr sz="2400" b="1" i="0">
-                <a:solidFill>
-                  <a:srgbClr val="17181A"/>
-                </a:solidFill>
-                <a:latin typeface="Verdana"/>
-              </a:rPr>
-              <a:t>« Le matériel est ouvert : on prend une séance, on la change, on la dépose. »</a:t>
-            </a:r>
-          </a:p>
-        </p:txBody>
-      </p:sp>
-      <p:sp>
-        <p:nvSpPr>
-          <p:cNvPr id="13" name="Rounded Rectangle 12"/>
-          <p:cNvSpPr/>
-          <p:nvPr/>
-        </p:nvSpPr>
-        <p:spPr>
-          <a:xfrm>
-            <a:off x="566928" y="4462272"/>
-            <a:ext cx="11057839" cy="1618487"/>
-          </a:xfrm>
-          <a:prstGeom prst="roundRect">
-            <a:avLst>
-              <a:gd name="adj" fmla="val 9039"/>
+              <a:gd name="adj" fmla="val 7126"/>
             </a:avLst>
           </a:prstGeom>
           <a:solidFill>
@@ -10292,14 +10673,14 @@
       </p:sp>
       <p:sp>
         <p:nvSpPr>
-          <p:cNvPr id="14" name="TextBox 13"/>
+          <p:cNvPr id="8" name="TextBox 7"/>
           <p:cNvSpPr txBox="1"/>
           <p:nvPr/>
         </p:nvSpPr>
         <p:spPr>
           <a:xfrm>
-            <a:off x="969264" y="4736592"/>
-            <a:ext cx="10234879" cy="1150620"/>
+            <a:off x="886968" y="2084831"/>
+            <a:ext cx="4806543" cy="387096"/>
           </a:xfrm>
           <a:prstGeom prst="rect">
             <a:avLst/>
@@ -10314,17 +10695,428 @@
           <a:p>
             <a:pPr algn="l">
               <a:lnSpc>
-                <a:spcPct val="145000"/>
+                <a:spcPct val="118000"/>
               </a:lnSpc>
             </a:pPr>
             <a:r>
-              <a:rPr sz="2000" b="0" i="0">
-                <a:solidFill>
-                  <a:srgbClr val="4B4F52"/>
+              <a:rPr sz="2400" b="1" i="0">
+                <a:solidFill>
+                  <a:srgbClr val="0D7A6F"/>
                 </a:solidFill>
                 <a:latin typeface="Verdana"/>
               </a:rPr>
-              <a:t>Le dépôt accepte la version d'un enseignant à côté de l'officielle, sans jamais l'écraser. Ce n'est pas un manuel fermé : c'est un point de départ qui existe le lundi matin.</a:t>
+              <a:t>La règle</a:t>
+            </a:r>
+          </a:p>
+        </p:txBody>
+      </p:sp>
+      <p:sp>
+        <p:nvSpPr>
+          <p:cNvPr id="9" name="TextBox 8"/>
+          <p:cNvSpPr txBox="1"/>
+          <p:nvPr/>
+        </p:nvSpPr>
+        <p:spPr>
+          <a:xfrm>
+            <a:off x="886968" y="2499360"/>
+            <a:ext cx="4806543" cy="1089660"/>
+          </a:xfrm>
+          <a:prstGeom prst="rect">
+            <a:avLst/>
+          </a:prstGeom>
+          <a:noFill/>
+        </p:spPr>
+        <p:txBody>
+          <a:bodyPr wrap="square" lIns="0" rIns="0" tIns="0" bIns="0" anchor="t">
+            <a:spAutoFit/>
+          </a:bodyPr>
+          <a:lstStyle/>
+          <a:p>
+            <a:pPr algn="l">
+              <a:lnSpc>
+                <a:spcPct val="142000"/>
+              </a:lnSpc>
+            </a:pPr>
+            <a:r>
+              <a:rPr sz="1800" b="0" i="0">
+                <a:solidFill>
+                  <a:srgbClr val="3A3D40"/>
+                </a:solidFill>
+                <a:latin typeface="Verdana"/>
+              </a:rPr>
+              <a:t>un énoncé, gros, seul : la diapositive que les élèves photographient</a:t>
+            </a:r>
+          </a:p>
+        </p:txBody>
+      </p:sp>
+      <p:sp>
+        <p:nvSpPr>
+          <p:cNvPr id="10" name="Rounded Rectangle 9"/>
+          <p:cNvSpPr/>
+          <p:nvPr/>
+        </p:nvSpPr>
+        <p:spPr>
+          <a:xfrm>
+            <a:off x="6178143" y="1810512"/>
+            <a:ext cx="5446623" cy="2052828"/>
+          </a:xfrm>
+          <a:prstGeom prst="roundRect">
+            <a:avLst>
+              <a:gd name="adj" fmla="val 7126"/>
+            </a:avLst>
+          </a:prstGeom>
+          <a:solidFill>
+            <a:srgbClr val="FFFFFF"/>
+          </a:solidFill>
+          <a:ln w="12700">
+            <a:solidFill>
+              <a:srgbClr val="EAEAE8"/>
+            </a:solidFill>
+          </a:ln>
+          <a:effectLst/>
+        </p:spPr>
+        <p:style>
+          <a:lnRef idx="1">
+            <a:schemeClr val="accent1"/>
+          </a:lnRef>
+          <a:fillRef idx="3">
+            <a:schemeClr val="accent1"/>
+          </a:fillRef>
+          <a:effectRef idx="2">
+            <a:schemeClr val="accent1"/>
+          </a:effectRef>
+          <a:fontRef idx="minor">
+            <a:schemeClr val="lt1"/>
+          </a:fontRef>
+        </p:style>
+        <p:txBody>
+          <a:bodyPr rtlCol="0" anchor="ctr"/>
+          <a:lstStyle/>
+          <a:p/>
+        </p:txBody>
+      </p:sp>
+      <p:sp>
+        <p:nvSpPr>
+          <p:cNvPr id="11" name="TextBox 10"/>
+          <p:cNvSpPr txBox="1"/>
+          <p:nvPr/>
+        </p:nvSpPr>
+        <p:spPr>
+          <a:xfrm>
+            <a:off x="6498183" y="2084831"/>
+            <a:ext cx="4806543" cy="387096"/>
+          </a:xfrm>
+          <a:prstGeom prst="rect">
+            <a:avLst/>
+          </a:prstGeom>
+          <a:noFill/>
+        </p:spPr>
+        <p:txBody>
+          <a:bodyPr wrap="square" lIns="0" rIns="0" tIns="0" bIns="0" anchor="t">
+            <a:spAutoFit/>
+          </a:bodyPr>
+          <a:lstStyle/>
+          <a:p>
+            <a:pPr algn="l">
+              <a:lnSpc>
+                <a:spcPct val="118000"/>
+              </a:lnSpc>
+            </a:pPr>
+            <a:r>
+              <a:rPr sz="2400" b="1" i="0">
+                <a:solidFill>
+                  <a:srgbClr val="0D7A6F"/>
+                </a:solidFill>
+                <a:latin typeface="Verdana"/>
+              </a:rPr>
+              <a:t>L'exercice projeté</a:t>
+            </a:r>
+          </a:p>
+        </p:txBody>
+      </p:sp>
+      <p:sp>
+        <p:nvSpPr>
+          <p:cNvPr id="12" name="TextBox 11"/>
+          <p:cNvSpPr txBox="1"/>
+          <p:nvPr/>
+        </p:nvSpPr>
+        <p:spPr>
+          <a:xfrm>
+            <a:off x="6498183" y="2499360"/>
+            <a:ext cx="4806543" cy="1089660"/>
+          </a:xfrm>
+          <a:prstGeom prst="rect">
+            <a:avLst/>
+          </a:prstGeom>
+          <a:noFill/>
+        </p:spPr>
+        <p:txBody>
+          <a:bodyPr wrap="square" lIns="0" rIns="0" tIns="0" bIns="0" anchor="t">
+            <a:spAutoFit/>
+          </a:bodyPr>
+          <a:lstStyle/>
+          <a:p>
+            <a:pPr algn="l">
+              <a:lnSpc>
+                <a:spcPct val="142000"/>
+              </a:lnSpc>
+            </a:pPr>
+            <a:r>
+              <a:rPr sz="1800" b="0" i="0">
+                <a:solidFill>
+                  <a:srgbClr val="3A3D40"/>
+                </a:solidFill>
+                <a:latin typeface="Verdana"/>
+              </a:rPr>
+              <a:t>le même que dans le module, suivi de son corrigé, à la même place</a:t>
+            </a:r>
+          </a:p>
+        </p:txBody>
+      </p:sp>
+      <p:sp>
+        <p:nvSpPr>
+          <p:cNvPr id="13" name="Rounded Rectangle 12"/>
+          <p:cNvSpPr/>
+          <p:nvPr/>
+        </p:nvSpPr>
+        <p:spPr>
+          <a:xfrm>
+            <a:off x="566928" y="4027932"/>
+            <a:ext cx="5446623" cy="2052828"/>
+          </a:xfrm>
+          <a:prstGeom prst="roundRect">
+            <a:avLst>
+              <a:gd name="adj" fmla="val 7126"/>
+            </a:avLst>
+          </a:prstGeom>
+          <a:solidFill>
+            <a:srgbClr val="FFFFFF"/>
+          </a:solidFill>
+          <a:ln w="12700">
+            <a:solidFill>
+              <a:srgbClr val="EAEAE8"/>
+            </a:solidFill>
+          </a:ln>
+          <a:effectLst/>
+        </p:spPr>
+        <p:style>
+          <a:lnRef idx="1">
+            <a:schemeClr val="accent1"/>
+          </a:lnRef>
+          <a:fillRef idx="3">
+            <a:schemeClr val="accent1"/>
+          </a:fillRef>
+          <a:effectRef idx="2">
+            <a:schemeClr val="accent1"/>
+          </a:effectRef>
+          <a:fontRef idx="minor">
+            <a:schemeClr val="lt1"/>
+          </a:fontRef>
+        </p:style>
+        <p:txBody>
+          <a:bodyPr rtlCol="0" anchor="ctr"/>
+          <a:lstStyle/>
+          <a:p/>
+        </p:txBody>
+      </p:sp>
+      <p:sp>
+        <p:nvSpPr>
+          <p:cNvPr id="14" name="TextBox 13"/>
+          <p:cNvSpPr txBox="1"/>
+          <p:nvPr/>
+        </p:nvSpPr>
+        <p:spPr>
+          <a:xfrm>
+            <a:off x="886968" y="4302252"/>
+            <a:ext cx="4806543" cy="387096"/>
+          </a:xfrm>
+          <a:prstGeom prst="rect">
+            <a:avLst/>
+          </a:prstGeom>
+          <a:noFill/>
+        </p:spPr>
+        <p:txBody>
+          <a:bodyPr wrap="square" lIns="0" rIns="0" tIns="0" bIns="0" anchor="t">
+            <a:spAutoFit/>
+          </a:bodyPr>
+          <a:lstStyle/>
+          <a:p>
+            <a:pPr algn="l">
+              <a:lnSpc>
+                <a:spcPct val="118000"/>
+              </a:lnSpc>
+            </a:pPr>
+            <a:r>
+              <a:rPr sz="2400" b="1" i="0">
+                <a:solidFill>
+                  <a:srgbClr val="0D7A6F"/>
+                </a:solidFill>
+                <a:latin typeface="Verdana"/>
+              </a:rPr>
+              <a:t>Le piège</a:t>
+            </a:r>
+          </a:p>
+        </p:txBody>
+      </p:sp>
+      <p:sp>
+        <p:nvSpPr>
+          <p:cNvPr id="15" name="TextBox 14"/>
+          <p:cNvSpPr txBox="1"/>
+          <p:nvPr/>
+        </p:nvSpPr>
+        <p:spPr>
+          <a:xfrm>
+            <a:off x="886968" y="4716780"/>
+            <a:ext cx="4806543" cy="1089660"/>
+          </a:xfrm>
+          <a:prstGeom prst="rect">
+            <a:avLst/>
+          </a:prstGeom>
+          <a:noFill/>
+        </p:spPr>
+        <p:txBody>
+          <a:bodyPr wrap="square" lIns="0" rIns="0" tIns="0" bIns="0" anchor="t">
+            <a:spAutoFit/>
+          </a:bodyPr>
+          <a:lstStyle/>
+          <a:p>
+            <a:pPr algn="l">
+              <a:lnSpc>
+                <a:spcPct val="142000"/>
+              </a:lnSpc>
+            </a:pPr>
+            <a:r>
+              <a:rPr sz="1800" b="0" i="0">
+                <a:solidFill>
+                  <a:srgbClr val="3A3D40"/>
+                </a:solidFill>
+                <a:latin typeface="Verdana"/>
+              </a:rPr>
+              <a:t>ce qu'on entend souvent, à côté de ce qu'il faut dire</a:t>
+            </a:r>
+          </a:p>
+        </p:txBody>
+      </p:sp>
+      <p:sp>
+        <p:nvSpPr>
+          <p:cNvPr id="16" name="Rounded Rectangle 15"/>
+          <p:cNvSpPr/>
+          <p:nvPr/>
+        </p:nvSpPr>
+        <p:spPr>
+          <a:xfrm>
+            <a:off x="6178143" y="4027932"/>
+            <a:ext cx="5446623" cy="2052828"/>
+          </a:xfrm>
+          <a:prstGeom prst="roundRect">
+            <a:avLst>
+              <a:gd name="adj" fmla="val 7126"/>
+            </a:avLst>
+          </a:prstGeom>
+          <a:solidFill>
+            <a:srgbClr val="FFFFFF"/>
+          </a:solidFill>
+          <a:ln w="12700">
+            <a:solidFill>
+              <a:srgbClr val="EAEAE8"/>
+            </a:solidFill>
+          </a:ln>
+          <a:effectLst/>
+        </p:spPr>
+        <p:style>
+          <a:lnRef idx="1">
+            <a:schemeClr val="accent1"/>
+          </a:lnRef>
+          <a:fillRef idx="3">
+            <a:schemeClr val="accent1"/>
+          </a:fillRef>
+          <a:effectRef idx="2">
+            <a:schemeClr val="accent1"/>
+          </a:effectRef>
+          <a:fontRef idx="minor">
+            <a:schemeClr val="lt1"/>
+          </a:fontRef>
+        </p:style>
+        <p:txBody>
+          <a:bodyPr rtlCol="0" anchor="ctr"/>
+          <a:lstStyle/>
+          <a:p/>
+        </p:txBody>
+      </p:sp>
+      <p:sp>
+        <p:nvSpPr>
+          <p:cNvPr id="17" name="TextBox 16"/>
+          <p:cNvSpPr txBox="1"/>
+          <p:nvPr/>
+        </p:nvSpPr>
+        <p:spPr>
+          <a:xfrm>
+            <a:off x="6498183" y="4302252"/>
+            <a:ext cx="4806543" cy="387096"/>
+          </a:xfrm>
+          <a:prstGeom prst="rect">
+            <a:avLst/>
+          </a:prstGeom>
+          <a:noFill/>
+        </p:spPr>
+        <p:txBody>
+          <a:bodyPr wrap="square" lIns="0" rIns="0" tIns="0" bIns="0" anchor="t">
+            <a:spAutoFit/>
+          </a:bodyPr>
+          <a:lstStyle/>
+          <a:p>
+            <a:pPr algn="l">
+              <a:lnSpc>
+                <a:spcPct val="118000"/>
+              </a:lnSpc>
+            </a:pPr>
+            <a:r>
+              <a:rPr sz="2400" b="1" i="0">
+                <a:solidFill>
+                  <a:srgbClr val="0D7A6F"/>
+                </a:solidFill>
+                <a:latin typeface="Verdana"/>
+              </a:rPr>
+              <a:t>Le billet de sortie</a:t>
+            </a:r>
+          </a:p>
+        </p:txBody>
+      </p:sp>
+      <p:sp>
+        <p:nvSpPr>
+          <p:cNvPr id="18" name="TextBox 17"/>
+          <p:cNvSpPr txBox="1"/>
+          <p:nvPr/>
+        </p:nvSpPr>
+        <p:spPr>
+          <a:xfrm>
+            <a:off x="6498183" y="4716780"/>
+            <a:ext cx="4806543" cy="1089660"/>
+          </a:xfrm>
+          <a:prstGeom prst="rect">
+            <a:avLst/>
+          </a:prstGeom>
+          <a:noFill/>
+        </p:spPr>
+        <p:txBody>
+          <a:bodyPr wrap="square" lIns="0" rIns="0" tIns="0" bIns="0" anchor="t">
+            <a:spAutoFit/>
+          </a:bodyPr>
+          <a:lstStyle/>
+          <a:p>
+            <a:pPr algn="l">
+              <a:lnSpc>
+                <a:spcPct val="142000"/>
+              </a:lnSpc>
+            </a:pPr>
+            <a:r>
+              <a:rPr sz="1800" b="0" i="0">
+                <a:solidFill>
+                  <a:srgbClr val="3A3D40"/>
+                </a:solidFill>
+                <a:latin typeface="Verdana"/>
+              </a:rPr>
+              <a:t>la dernière diapositive, celle qui ferme la séance — 12 524 notes de présentateur en tout</a:t>
             </a:r>
           </a:p>
         </p:txBody>
